--- a/deep_learning/image_segmentation/1_image_segmentation.pptx
+++ b/deep_learning/image_segmentation/1_image_segmentation.pptx
@@ -5,10 +5,10 @@
     <p:sldMasterId id="2147483648" r:id="rId1"/>
   </p:sldMasterIdLst>
   <p:notesMasterIdLst>
-    <p:notesMasterId r:id="rId14"/>
+    <p:notesMasterId r:id="rId17"/>
   </p:notesMasterIdLst>
   <p:handoutMasterIdLst>
-    <p:handoutMasterId r:id="rId15"/>
+    <p:handoutMasterId r:id="rId18"/>
   </p:handoutMasterIdLst>
   <p:sldIdLst>
     <p:sldId id="276" r:id="rId2"/>
@@ -17,12 +17,15 @@
     <p:sldId id="279" r:id="rId5"/>
     <p:sldId id="280" r:id="rId6"/>
     <p:sldId id="283" r:id="rId7"/>
-    <p:sldId id="284" r:id="rId8"/>
-    <p:sldId id="285" r:id="rId9"/>
-    <p:sldId id="277" r:id="rId10"/>
-    <p:sldId id="282" r:id="rId11"/>
-    <p:sldId id="275" r:id="rId12"/>
-    <p:sldId id="281" r:id="rId13"/>
+    <p:sldId id="286" r:id="rId8"/>
+    <p:sldId id="284" r:id="rId9"/>
+    <p:sldId id="285" r:id="rId10"/>
+    <p:sldId id="277" r:id="rId11"/>
+    <p:sldId id="287" r:id="rId12"/>
+    <p:sldId id="282" r:id="rId13"/>
+    <p:sldId id="275" r:id="rId14"/>
+    <p:sldId id="288" r:id="rId15"/>
+    <p:sldId id="281" r:id="rId16"/>
   </p:sldIdLst>
   <p:sldSz cx="12192000" cy="6858000"/>
   <p:notesSz cx="6858000" cy="9144000"/>
@@ -226,7 +229,7 @@
           <a:p>
             <a:fld id="{7BAEECA8-D063-486F-AE31-5020270C1449}" type="datetimeFigureOut">
               <a:rPr lang="en-US" smtClean="0"/>
-              <a:t>4/23/2026</a:t>
+              <a:t>4/27/2026</a:t>
             </a:fld>
             <a:endParaRPr lang="en-US"/>
           </a:p>
@@ -403,7 +406,7 @@
           <a:p>
             <a:fld id="{CB233BD1-3BA8-448D-9D08-7846095EA517}" type="datetimeFigureOut">
               <a:rPr lang="en-US" smtClean="0"/>
-              <a:t>4/23/2026</a:t>
+              <a:t>4/27/2026</a:t>
             </a:fld>
             <a:endParaRPr lang="en-US"/>
           </a:p>
@@ -817,7 +820,7 @@
           <a:p>
             <a:fld id="{6383FAE1-13DE-4511-8C1B-C8AFB720664C}" type="datetimeFigureOut">
               <a:rPr lang="en-US" smtClean="0"/>
-              <a:t>4/23/2026</a:t>
+              <a:t>4/27/2026</a:t>
             </a:fld>
             <a:endParaRPr lang="en-US"/>
           </a:p>
@@ -1015,7 +1018,7 @@
           <a:p>
             <a:fld id="{6383FAE1-13DE-4511-8C1B-C8AFB720664C}" type="datetimeFigureOut">
               <a:rPr lang="en-US" smtClean="0"/>
-              <a:t>4/23/2026</a:t>
+              <a:t>4/27/2026</a:t>
             </a:fld>
             <a:endParaRPr lang="en-US"/>
           </a:p>
@@ -1223,7 +1226,7 @@
           <a:p>
             <a:fld id="{6383FAE1-13DE-4511-8C1B-C8AFB720664C}" type="datetimeFigureOut">
               <a:rPr lang="en-US" smtClean="0"/>
-              <a:t>4/23/2026</a:t>
+              <a:t>4/27/2026</a:t>
             </a:fld>
             <a:endParaRPr lang="en-US"/>
           </a:p>
@@ -1421,7 +1424,7 @@
           <a:p>
             <a:fld id="{6383FAE1-13DE-4511-8C1B-C8AFB720664C}" type="datetimeFigureOut">
               <a:rPr lang="en-US" smtClean="0"/>
-              <a:t>4/23/2026</a:t>
+              <a:t>4/27/2026</a:t>
             </a:fld>
             <a:endParaRPr lang="en-US"/>
           </a:p>
@@ -1696,7 +1699,7 @@
           <a:p>
             <a:fld id="{6383FAE1-13DE-4511-8C1B-C8AFB720664C}" type="datetimeFigureOut">
               <a:rPr lang="en-US" smtClean="0"/>
-              <a:t>4/23/2026</a:t>
+              <a:t>4/27/2026</a:t>
             </a:fld>
             <a:endParaRPr lang="en-US"/>
           </a:p>
@@ -1961,7 +1964,7 @@
           <a:p>
             <a:fld id="{6383FAE1-13DE-4511-8C1B-C8AFB720664C}" type="datetimeFigureOut">
               <a:rPr lang="en-US" smtClean="0"/>
-              <a:t>4/23/2026</a:t>
+              <a:t>4/27/2026</a:t>
             </a:fld>
             <a:endParaRPr lang="en-US"/>
           </a:p>
@@ -2373,7 +2376,7 @@
           <a:p>
             <a:fld id="{6383FAE1-13DE-4511-8C1B-C8AFB720664C}" type="datetimeFigureOut">
               <a:rPr lang="en-US" smtClean="0"/>
-              <a:t>4/23/2026</a:t>
+              <a:t>4/27/2026</a:t>
             </a:fld>
             <a:endParaRPr lang="en-US"/>
           </a:p>
@@ -2514,7 +2517,7 @@
           <a:p>
             <a:fld id="{6383FAE1-13DE-4511-8C1B-C8AFB720664C}" type="datetimeFigureOut">
               <a:rPr lang="en-US" smtClean="0"/>
-              <a:t>4/23/2026</a:t>
+              <a:t>4/27/2026</a:t>
             </a:fld>
             <a:endParaRPr lang="en-US"/>
           </a:p>
@@ -2627,7 +2630,7 @@
           <a:p>
             <a:fld id="{6383FAE1-13DE-4511-8C1B-C8AFB720664C}" type="datetimeFigureOut">
               <a:rPr lang="en-US" smtClean="0"/>
-              <a:t>4/23/2026</a:t>
+              <a:t>4/27/2026</a:t>
             </a:fld>
             <a:endParaRPr lang="en-US"/>
           </a:p>
@@ -2938,7 +2941,7 @@
           <a:p>
             <a:fld id="{6383FAE1-13DE-4511-8C1B-C8AFB720664C}" type="datetimeFigureOut">
               <a:rPr lang="en-US" smtClean="0"/>
-              <a:t>4/23/2026</a:t>
+              <a:t>4/27/2026</a:t>
             </a:fld>
             <a:endParaRPr lang="en-US"/>
           </a:p>
@@ -3229,7 +3232,7 @@
           <a:p>
             <a:fld id="{6383FAE1-13DE-4511-8C1B-C8AFB720664C}" type="datetimeFigureOut">
               <a:rPr lang="en-US" smtClean="0"/>
-              <a:t>4/23/2026</a:t>
+              <a:t>4/27/2026</a:t>
             </a:fld>
             <a:endParaRPr lang="en-US"/>
           </a:p>
@@ -3473,7 +3476,7 @@
           <a:p>
             <a:fld id="{6383FAE1-13DE-4511-8C1B-C8AFB720664C}" type="datetimeFigureOut">
               <a:rPr lang="en-US" smtClean="0"/>
-              <a:t>4/23/2026</a:t>
+              <a:t>4/27/2026</a:t>
             </a:fld>
             <a:endParaRPr lang="en-US"/>
           </a:p>
@@ -4053,6 +4056,435 @@
         <p:cNvPr id="1" name="">
           <a:extLst>
             <a:ext uri="{FF2B5EF4-FFF2-40B4-BE49-F238E27FC236}">
+              <a16:creationId xmlns:a16="http://schemas.microsoft.com/office/drawing/2014/main" id="{879B318C-05A5-7EFB-30F5-32AB6A862469}"/>
+            </a:ext>
+          </a:extLst>
+        </p:cNvPr>
+        <p:cNvGrpSpPr/>
+        <p:nvPr/>
+      </p:nvGrpSpPr>
+      <p:grpSpPr>
+        <a:xfrm>
+          <a:off x="0" y="0"/>
+          <a:ext cx="0" cy="0"/>
+          <a:chOff x="0" y="0"/>
+          <a:chExt cx="0" cy="0"/>
+        </a:xfrm>
+      </p:grpSpPr>
+      <p:sp>
+        <p:nvSpPr>
+          <p:cNvPr id="4" name="TextBox 3">
+            <a:extLst>
+              <a:ext uri="{FF2B5EF4-FFF2-40B4-BE49-F238E27FC236}">
+                <a16:creationId xmlns:a16="http://schemas.microsoft.com/office/drawing/2014/main" id="{CA375A26-49CB-0056-00C2-8F91436CD4DD}"/>
+              </a:ext>
+            </a:extLst>
+          </p:cNvPr>
+          <p:cNvSpPr txBox="1"/>
+          <p:nvPr/>
+        </p:nvSpPr>
+        <p:spPr>
+          <a:xfrm>
+            <a:off x="310896" y="2486490"/>
+            <a:ext cx="11283696" cy="707886"/>
+          </a:xfrm>
+          <a:prstGeom prst="rect">
+            <a:avLst/>
+          </a:prstGeom>
+          <a:noFill/>
+        </p:spPr>
+        <p:txBody>
+          <a:bodyPr wrap="square">
+            <a:spAutoFit/>
+          </a:bodyPr>
+          <a:lstStyle/>
+          <a:p>
+            <a:pPr algn="ctr"/>
+            <a:r>
+              <a:rPr lang="en-US" sz="4000" b="1" dirty="0">
+                <a:solidFill>
+                  <a:schemeClr val="accent6">
+                    <a:lumMod val="60000"/>
+                    <a:lumOff val="40000"/>
+                  </a:schemeClr>
+                </a:solidFill>
+              </a:rPr>
+              <a:t>Evolution of Segmentation Models</a:t>
+            </a:r>
+          </a:p>
+        </p:txBody>
+      </p:sp>
+    </p:spTree>
+    <p:extLst>
+      <p:ext uri="{BB962C8B-B14F-4D97-AF65-F5344CB8AC3E}">
+        <p14:creationId xmlns:p14="http://schemas.microsoft.com/office/powerpoint/2010/main" val="2029071977"/>
+      </p:ext>
+    </p:extLst>
+  </p:cSld>
+  <p:clrMapOvr>
+    <a:masterClrMapping/>
+  </p:clrMapOvr>
+</p:sld>
+</file>
+
+<file path=ppt/slides/slide11.xml><?xml version="1.0" encoding="utf-8"?>
+<p:sld xmlns:a="http://schemas.openxmlformats.org/drawingml/2006/main" xmlns:r="http://schemas.openxmlformats.org/officeDocument/2006/relationships" xmlns:p="http://schemas.openxmlformats.org/presentationml/2006/main">
+  <p:cSld>
+    <p:spTree>
+      <p:nvGrpSpPr>
+        <p:cNvPr id="1" name="">
+          <a:extLst>
+            <a:ext uri="{FF2B5EF4-FFF2-40B4-BE49-F238E27FC236}">
+              <a16:creationId xmlns:a16="http://schemas.microsoft.com/office/drawing/2014/main" id="{E5FDA105-842E-3A78-7FA8-AA172BD797BB}"/>
+            </a:ext>
+          </a:extLst>
+        </p:cNvPr>
+        <p:cNvGrpSpPr/>
+        <p:nvPr/>
+      </p:nvGrpSpPr>
+      <p:grpSpPr>
+        <a:xfrm>
+          <a:off x="0" y="0"/>
+          <a:ext cx="0" cy="0"/>
+          <a:chOff x="0" y="0"/>
+          <a:chExt cx="0" cy="0"/>
+        </a:xfrm>
+      </p:grpSpPr>
+      <p:sp>
+        <p:nvSpPr>
+          <p:cNvPr id="4" name="TextBox 3">
+            <a:extLst>
+              <a:ext uri="{FF2B5EF4-FFF2-40B4-BE49-F238E27FC236}">
+                <a16:creationId xmlns:a16="http://schemas.microsoft.com/office/drawing/2014/main" id="{6626ED9B-2190-8B30-E417-394E998E722A}"/>
+              </a:ext>
+            </a:extLst>
+          </p:cNvPr>
+          <p:cNvSpPr txBox="1"/>
+          <p:nvPr/>
+        </p:nvSpPr>
+        <p:spPr>
+          <a:xfrm>
+            <a:off x="265176" y="346794"/>
+            <a:ext cx="11283696" cy="5632311"/>
+          </a:xfrm>
+          <a:prstGeom prst="rect">
+            <a:avLst/>
+          </a:prstGeom>
+          <a:noFill/>
+        </p:spPr>
+        <p:txBody>
+          <a:bodyPr wrap="square">
+            <a:spAutoFit/>
+          </a:bodyPr>
+          <a:lstStyle/>
+          <a:p>
+            <a:r>
+              <a:rPr lang="en-US" sz="2400" b="1" dirty="0">
+                <a:solidFill>
+                  <a:schemeClr val="accent6">
+                    <a:lumMod val="60000"/>
+                    <a:lumOff val="40000"/>
+                  </a:schemeClr>
+                </a:solidFill>
+              </a:rPr>
+              <a:t>Phase 1: Classical CNN Era (2014–2017)</a:t>
+            </a:r>
+          </a:p>
+          <a:p>
+            <a:pPr marL="342900" indent="-342900">
+              <a:buFont typeface="Arial" panose="020B0604020202020204" pitchFamily="34" charset="0"/>
+              <a:buChar char="•"/>
+            </a:pPr>
+            <a:r>
+              <a:rPr lang="en-US" sz="2400" dirty="0">
+                <a:solidFill>
+                  <a:schemeClr val="accent6">
+                    <a:lumMod val="60000"/>
+                    <a:lumOff val="40000"/>
+                  </a:schemeClr>
+                </a:solidFill>
+              </a:rPr>
+              <a:t>Fully Convolutional Networks (FCN) → first breakthrough </a:t>
+            </a:r>
+          </a:p>
+          <a:p>
+            <a:pPr marL="342900" indent="-342900">
+              <a:buFont typeface="Arial" panose="020B0604020202020204" pitchFamily="34" charset="0"/>
+              <a:buChar char="•"/>
+            </a:pPr>
+            <a:r>
+              <a:rPr lang="en-US" sz="2400" dirty="0">
+                <a:solidFill>
+                  <a:schemeClr val="accent6">
+                    <a:lumMod val="60000"/>
+                    <a:lumOff val="40000"/>
+                  </a:schemeClr>
+                </a:solidFill>
+              </a:rPr>
+              <a:t>Then came: </a:t>
+            </a:r>
+          </a:p>
+          <a:p>
+            <a:pPr marL="800100" lvl="1" indent="-342900">
+              <a:buFont typeface="Arial" panose="020B0604020202020204" pitchFamily="34" charset="0"/>
+              <a:buChar char="•"/>
+            </a:pPr>
+            <a:r>
+              <a:rPr lang="en-US" sz="2400" dirty="0">
+                <a:solidFill>
+                  <a:schemeClr val="accent6">
+                    <a:lumMod val="60000"/>
+                    <a:lumOff val="40000"/>
+                  </a:schemeClr>
+                </a:solidFill>
+              </a:rPr>
+              <a:t>U-Net </a:t>
+            </a:r>
+          </a:p>
+          <a:p>
+            <a:pPr marL="800100" lvl="1" indent="-342900">
+              <a:buFont typeface="Arial" panose="020B0604020202020204" pitchFamily="34" charset="0"/>
+              <a:buChar char="•"/>
+            </a:pPr>
+            <a:r>
+              <a:rPr lang="en-US" sz="2400" dirty="0" err="1">
+                <a:solidFill>
+                  <a:schemeClr val="accent6">
+                    <a:lumMod val="60000"/>
+                    <a:lumOff val="40000"/>
+                  </a:schemeClr>
+                </a:solidFill>
+              </a:rPr>
+              <a:t>SegNet</a:t>
+            </a:r>
+            <a:r>
+              <a:rPr lang="en-US" sz="2400" dirty="0">
+                <a:solidFill>
+                  <a:schemeClr val="accent6">
+                    <a:lumMod val="60000"/>
+                    <a:lumOff val="40000"/>
+                  </a:schemeClr>
+                </a:solidFill>
+              </a:rPr>
+              <a:t> </a:t>
+            </a:r>
+          </a:p>
+          <a:p>
+            <a:pPr marL="800100" lvl="1" indent="-342900">
+              <a:buFont typeface="Arial" panose="020B0604020202020204" pitchFamily="34" charset="0"/>
+              <a:buChar char="•"/>
+            </a:pPr>
+            <a:r>
+              <a:rPr lang="en-US" sz="2400" dirty="0" err="1">
+                <a:solidFill>
+                  <a:schemeClr val="accent6">
+                    <a:lumMod val="60000"/>
+                    <a:lumOff val="40000"/>
+                  </a:schemeClr>
+                </a:solidFill>
+              </a:rPr>
+              <a:t>DeepLab</a:t>
+            </a:r>
+            <a:endParaRPr lang="en-US" sz="2400" dirty="0">
+              <a:solidFill>
+                <a:schemeClr val="accent6">
+                  <a:lumMod val="60000"/>
+                  <a:lumOff val="40000"/>
+                </a:schemeClr>
+              </a:solidFill>
+            </a:endParaRPr>
+          </a:p>
+          <a:p>
+            <a:endParaRPr lang="en-US" sz="2400" dirty="0">
+              <a:solidFill>
+                <a:schemeClr val="accent6">
+                  <a:lumMod val="60000"/>
+                  <a:lumOff val="40000"/>
+                </a:schemeClr>
+              </a:solidFill>
+            </a:endParaRPr>
+          </a:p>
+          <a:p>
+            <a:endParaRPr lang="en-US" sz="2400" dirty="0">
+              <a:solidFill>
+                <a:schemeClr val="accent6">
+                  <a:lumMod val="60000"/>
+                  <a:lumOff val="40000"/>
+                </a:schemeClr>
+              </a:solidFill>
+            </a:endParaRPr>
+          </a:p>
+          <a:p>
+            <a:r>
+              <a:rPr lang="en-US" sz="2400" b="1" dirty="0">
+                <a:solidFill>
+                  <a:schemeClr val="accent6">
+                    <a:lumMod val="60000"/>
+                    <a:lumOff val="40000"/>
+                  </a:schemeClr>
+                </a:solidFill>
+              </a:rPr>
+              <a:t>Phase 2: Detection + Segmentation (2017–2020)</a:t>
+            </a:r>
+          </a:p>
+          <a:p>
+            <a:pPr marL="342900" indent="-342900">
+              <a:buFont typeface="Arial" panose="020B0604020202020204" pitchFamily="34" charset="0"/>
+              <a:buChar char="•"/>
+            </a:pPr>
+            <a:r>
+              <a:rPr lang="en-US" sz="2400" b="1" dirty="0">
+                <a:solidFill>
+                  <a:schemeClr val="accent6">
+                    <a:lumMod val="60000"/>
+                    <a:lumOff val="40000"/>
+                  </a:schemeClr>
+                </a:solidFill>
+              </a:rPr>
+              <a:t>Mask R-CNN</a:t>
+            </a:r>
+            <a:r>
+              <a:rPr lang="en-US" sz="2400" dirty="0">
+                <a:solidFill>
+                  <a:schemeClr val="accent6">
+                    <a:lumMod val="60000"/>
+                    <a:lumOff val="40000"/>
+                  </a:schemeClr>
+                </a:solidFill>
+              </a:rPr>
+              <a:t> → instance segmentation breakthrough </a:t>
+            </a:r>
+          </a:p>
+          <a:p>
+            <a:pPr marL="342900" indent="-342900">
+              <a:buFont typeface="Arial" panose="020B0604020202020204" pitchFamily="34" charset="0"/>
+              <a:buChar char="•"/>
+            </a:pPr>
+            <a:r>
+              <a:rPr lang="en-US" sz="2400" dirty="0">
+                <a:solidFill>
+                  <a:schemeClr val="accent6">
+                    <a:lumMod val="60000"/>
+                    <a:lumOff val="40000"/>
+                  </a:schemeClr>
+                </a:solidFill>
+              </a:rPr>
+              <a:t>Built on object detection pipelines </a:t>
+            </a:r>
+          </a:p>
+          <a:p>
+            <a:endParaRPr lang="en-US" sz="2400" dirty="0">
+              <a:solidFill>
+                <a:schemeClr val="accent6">
+                  <a:lumMod val="60000"/>
+                  <a:lumOff val="40000"/>
+                </a:schemeClr>
+              </a:solidFill>
+            </a:endParaRPr>
+          </a:p>
+          <a:p>
+            <a:endParaRPr lang="en-US" sz="2400" dirty="0">
+              <a:solidFill>
+                <a:schemeClr val="accent6">
+                  <a:lumMod val="60000"/>
+                  <a:lumOff val="40000"/>
+                </a:schemeClr>
+              </a:solidFill>
+            </a:endParaRPr>
+          </a:p>
+          <a:p>
+            <a:r>
+              <a:rPr lang="en-US" sz="2400" b="1" dirty="0">
+                <a:solidFill>
+                  <a:schemeClr val="accent6">
+                    <a:lumMod val="60000"/>
+                    <a:lumOff val="40000"/>
+                  </a:schemeClr>
+                </a:solidFill>
+              </a:rPr>
+              <a:t>Phase 3: Advanced CNN Architectures</a:t>
+            </a:r>
+          </a:p>
+          <a:p>
+            <a:r>
+              <a:rPr lang="en-US" sz="2400" dirty="0">
+                <a:solidFill>
+                  <a:schemeClr val="accent6">
+                    <a:lumMod val="60000"/>
+                    <a:lumOff val="40000"/>
+                  </a:schemeClr>
+                </a:solidFill>
+              </a:rPr>
+              <a:t>Variants of U-Net: </a:t>
+            </a:r>
+            <a:r>
+              <a:rPr lang="en-US" sz="2400" dirty="0" err="1">
+                <a:solidFill>
+                  <a:schemeClr val="accent6">
+                    <a:lumMod val="60000"/>
+                    <a:lumOff val="40000"/>
+                  </a:schemeClr>
+                </a:solidFill>
+              </a:rPr>
+              <a:t>UNet</a:t>
+            </a:r>
+            <a:r>
+              <a:rPr lang="en-US" sz="2400" dirty="0">
+                <a:solidFill>
+                  <a:schemeClr val="accent6">
+                    <a:lumMod val="60000"/>
+                    <a:lumOff val="40000"/>
+                  </a:schemeClr>
+                </a:solidFill>
+              </a:rPr>
+              <a:t>++ , Attention U-Net , </a:t>
+            </a:r>
+            <a:r>
+              <a:rPr lang="en-US" sz="2400" dirty="0" err="1">
+                <a:solidFill>
+                  <a:schemeClr val="accent6">
+                    <a:lumMod val="60000"/>
+                    <a:lumOff val="40000"/>
+                  </a:schemeClr>
+                </a:solidFill>
+              </a:rPr>
+              <a:t>ResUNet</a:t>
+            </a:r>
+            <a:r>
+              <a:rPr lang="en-US" sz="2400" dirty="0">
+                <a:solidFill>
+                  <a:schemeClr val="accent6">
+                    <a:lumMod val="60000"/>
+                    <a:lumOff val="40000"/>
+                  </a:schemeClr>
+                </a:solidFill>
+              </a:rPr>
+              <a:t> </a:t>
+            </a:r>
+          </a:p>
+        </p:txBody>
+      </p:sp>
+    </p:spTree>
+    <p:extLst>
+      <p:ext uri="{BB962C8B-B14F-4D97-AF65-F5344CB8AC3E}">
+        <p14:creationId xmlns:p14="http://schemas.microsoft.com/office/powerpoint/2010/main" val="3985055306"/>
+      </p:ext>
+    </p:extLst>
+  </p:cSld>
+  <p:clrMapOvr>
+    <a:masterClrMapping/>
+  </p:clrMapOvr>
+</p:sld>
+</file>
+
+<file path=ppt/slides/slide12.xml><?xml version="1.0" encoding="utf-8"?>
+<p:sld xmlns:a="http://schemas.openxmlformats.org/drawingml/2006/main" xmlns:r="http://schemas.openxmlformats.org/officeDocument/2006/relationships" xmlns:p="http://schemas.openxmlformats.org/presentationml/2006/main">
+  <p:cSld>
+    <p:spTree>
+      <p:nvGrpSpPr>
+        <p:cNvPr id="1" name="">
+          <a:extLst>
+            <a:ext uri="{FF2B5EF4-FFF2-40B4-BE49-F238E27FC236}">
               <a16:creationId xmlns:a16="http://schemas.microsoft.com/office/drawing/2014/main" id="{FC4B3726-E9D7-BAAC-A09C-46850EC0A35D}"/>
             </a:ext>
           </a:extLst>
@@ -4109,6 +4541,10 @@
             </a:r>
           </a:p>
           <a:p>
+            <a:pPr marL="342900" indent="-342900">
+              <a:buFont typeface="Arial" panose="020B0604020202020204" pitchFamily="34" charset="0"/>
+              <a:buChar char="•"/>
+            </a:pPr>
             <a:r>
               <a:rPr lang="en-US" sz="2400" dirty="0">
                 <a:solidFill>
@@ -4140,7 +4576,24 @@
                   </a:schemeClr>
                 </a:solidFill>
               </a:rPr>
-              <a:t>) , SAM (Segment Anything)</a:t>
+              <a:t>) ,</a:t>
+            </a:r>
+          </a:p>
+          <a:p>
+            <a:pPr marL="342900" indent="-342900">
+              <a:buFont typeface="Arial" panose="020B0604020202020204" pitchFamily="34" charset="0"/>
+              <a:buChar char="•"/>
+            </a:pPr>
+            <a:r>
+              <a:rPr lang="en-US" sz="2400" dirty="0">
+                <a:solidFill>
+                  <a:schemeClr val="accent6">
+                    <a:lumMod val="60000"/>
+                    <a:lumOff val="40000"/>
+                  </a:schemeClr>
+                </a:solidFill>
+              </a:rPr>
+              <a:t>SAM (Segment Anything)</a:t>
             </a:r>
           </a:p>
           <a:p>
@@ -4226,16 +4679,6 @@
               </a:rPr>
               <a:t>Prompt-based segmentation</a:t>
             </a:r>
-          </a:p>
-          <a:p>
-            <a:endParaRPr lang="en-US" sz="2400" dirty="0">
-              <a:solidFill>
-                <a:schemeClr val="accent6">
-                  <a:lumMod val="60000"/>
-                  <a:lumOff val="40000"/>
-                </a:schemeClr>
-              </a:solidFill>
-            </a:endParaRPr>
           </a:p>
         </p:txBody>
       </p:sp>
@@ -4252,7 +4695,7 @@
 </p:sld>
 </file>
 
-<file path=ppt/slides/slide11.xml><?xml version="1.0" encoding="utf-8"?>
+<file path=ppt/slides/slide13.xml><?xml version="1.0" encoding="utf-8"?>
 <p:sld xmlns:a="http://schemas.openxmlformats.org/drawingml/2006/main" xmlns:r="http://schemas.openxmlformats.org/officeDocument/2006/relationships" xmlns:p="http://schemas.openxmlformats.org/presentationml/2006/main">
   <p:cSld>
     <p:spTree>
@@ -4275,6 +4718,497 @@
           <a:chExt cx="0" cy="0"/>
         </a:xfrm>
       </p:grpSpPr>
+      <p:graphicFrame>
+        <p:nvGraphicFramePr>
+          <p:cNvPr id="5" name="Table 4">
+            <a:extLst>
+              <a:ext uri="{FF2B5EF4-FFF2-40B4-BE49-F238E27FC236}">
+                <a16:creationId xmlns:a16="http://schemas.microsoft.com/office/drawing/2014/main" id="{7A417B4F-511D-7C7F-2C09-DC7CB5F1E35B}"/>
+              </a:ext>
+            </a:extLst>
+          </p:cNvPr>
+          <p:cNvGraphicFramePr>
+            <a:graphicFrameLocks noGrp="1"/>
+          </p:cNvGraphicFramePr>
+          <p:nvPr>
+            <p:extLst>
+              <p:ext uri="{D42A27DB-BD31-4B8C-83A1-F6EECF244321}">
+                <p14:modId xmlns:p14="http://schemas.microsoft.com/office/powerpoint/2010/main" val="3108144778"/>
+              </p:ext>
+            </p:extLst>
+          </p:nvPr>
+        </p:nvGraphicFramePr>
+        <p:xfrm>
+          <a:off x="1280160" y="1253332"/>
+          <a:ext cx="10305288" cy="4351336"/>
+        </p:xfrm>
+        <a:graphic>
+          <a:graphicData uri="http://schemas.openxmlformats.org/drawingml/2006/table">
+            <a:tbl>
+              <a:tblPr>
+                <a:tableStyleId>{0505E3EF-67EA-436B-97B2-0124C06EBD24}</a:tableStyleId>
+              </a:tblPr>
+              <a:tblGrid>
+                <a:gridCol w="1234440">
+                  <a:extLst>
+                    <a:ext uri="{9D8B030D-6E8A-4147-A177-3AD203B41FA5}">
+                      <a16:colId xmlns:a16="http://schemas.microsoft.com/office/drawing/2014/main" val="2501860465"/>
+                    </a:ext>
+                  </a:extLst>
+                </a:gridCol>
+                <a:gridCol w="2587752">
+                  <a:extLst>
+                    <a:ext uri="{9D8B030D-6E8A-4147-A177-3AD203B41FA5}">
+                      <a16:colId xmlns:a16="http://schemas.microsoft.com/office/drawing/2014/main" val="2899715003"/>
+                    </a:ext>
+                  </a:extLst>
+                </a:gridCol>
+                <a:gridCol w="6483096">
+                  <a:extLst>
+                    <a:ext uri="{9D8B030D-6E8A-4147-A177-3AD203B41FA5}">
+                      <a16:colId xmlns:a16="http://schemas.microsoft.com/office/drawing/2014/main" val="4125587854"/>
+                    </a:ext>
+                  </a:extLst>
+                </a:gridCol>
+              </a:tblGrid>
+              <a:tr h="688300">
+                <a:tc>
+                  <a:txBody>
+                    <a:bodyPr/>
+                    <a:lstStyle/>
+                    <a:p>
+                      <a:pPr algn="ctr" rtl="0" fontAlgn="ctr">
+                        <a:buNone/>
+                      </a:pPr>
+                      <a:r>
+                        <a:rPr lang="en-US" sz="1500" b="1" u="sng" strike="noStrike" dirty="0">
+                          <a:effectLst/>
+                        </a:rPr>
+                        <a:t>Industry </a:t>
+                      </a:r>
+                      <a:endParaRPr lang="en-US" sz="1500" b="1" i="0" u="sng" strike="noStrike" dirty="0">
+                        <a:solidFill>
+                          <a:srgbClr val="A9D18E"/>
+                        </a:solidFill>
+                        <a:effectLst/>
+                        <a:latin typeface="Calibri" panose="020F0502020204030204" pitchFamily="34" charset="0"/>
+                      </a:endParaRPr>
+                    </a:p>
+                  </a:txBody>
+                  <a:tcPr marL="5923" marR="5923" marT="5923" marB="0" anchor="ctr"/>
+                </a:tc>
+                <a:tc>
+                  <a:txBody>
+                    <a:bodyPr/>
+                    <a:lstStyle/>
+                    <a:p>
+                      <a:pPr algn="ctr" rtl="0" fontAlgn="ctr">
+                        <a:buNone/>
+                      </a:pPr>
+                      <a:r>
+                        <a:rPr lang="en-US" sz="1500" b="1" u="sng" strike="noStrike">
+                          <a:effectLst/>
+                        </a:rPr>
+                        <a:t>Primary Models Used</a:t>
+                      </a:r>
+                      <a:endParaRPr lang="en-US" sz="1500" b="1" i="0" u="sng" strike="noStrike">
+                        <a:solidFill>
+                          <a:srgbClr val="A9D18E"/>
+                        </a:solidFill>
+                        <a:effectLst/>
+                        <a:latin typeface="Calibri" panose="020F0502020204030204" pitchFamily="34" charset="0"/>
+                      </a:endParaRPr>
+                    </a:p>
+                  </a:txBody>
+                  <a:tcPr marL="5923" marR="5923" marT="5923" marB="0" anchor="ctr"/>
+                </a:tc>
+                <a:tc>
+                  <a:txBody>
+                    <a:bodyPr/>
+                    <a:lstStyle/>
+                    <a:p>
+                      <a:pPr algn="ctr" rtl="0" fontAlgn="ctr">
+                        <a:buNone/>
+                      </a:pPr>
+                      <a:r>
+                        <a:rPr lang="en-US" sz="1500" b="1" u="sng" strike="noStrike" dirty="0">
+                          <a:effectLst/>
+                        </a:rPr>
+                        <a:t>Key Application</a:t>
+                      </a:r>
+                      <a:endParaRPr lang="en-US" sz="1500" b="1" i="0" u="sng" strike="noStrike" dirty="0">
+                        <a:solidFill>
+                          <a:srgbClr val="A9D18E"/>
+                        </a:solidFill>
+                        <a:effectLst/>
+                        <a:latin typeface="Calibri" panose="020F0502020204030204" pitchFamily="34" charset="0"/>
+                      </a:endParaRPr>
+                    </a:p>
+                  </a:txBody>
+                  <a:tcPr marL="5923" marR="5923" marT="5923" marB="0" anchor="ctr"/>
+                </a:tc>
+                <a:extLst>
+                  <a:ext uri="{0D108BD9-81ED-4DB2-BD59-A6C34878D82A}">
+                    <a16:rowId xmlns:a16="http://schemas.microsoft.com/office/drawing/2014/main" val="2491869008"/>
+                  </a:ext>
+                </a:extLst>
+              </a:tr>
+              <a:tr h="688300">
+                <a:tc>
+                  <a:txBody>
+                    <a:bodyPr/>
+                    <a:lstStyle/>
+                    <a:p>
+                      <a:pPr algn="ctr" rtl="0" fontAlgn="ctr">
+                        <a:buNone/>
+                      </a:pPr>
+                      <a:r>
+                        <a:rPr lang="en-US" sz="1500" u="none" strike="noStrike" dirty="0">
+                          <a:effectLst/>
+                        </a:rPr>
+                        <a:t>Healthcare</a:t>
+                      </a:r>
+                      <a:endParaRPr lang="en-US" sz="1500" b="0" i="0" u="none" strike="noStrike" dirty="0">
+                        <a:solidFill>
+                          <a:srgbClr val="A9D18E"/>
+                        </a:solidFill>
+                        <a:effectLst/>
+                        <a:latin typeface="Calibri" panose="020F0502020204030204" pitchFamily="34" charset="0"/>
+                      </a:endParaRPr>
+                    </a:p>
+                  </a:txBody>
+                  <a:tcPr marL="5923" marR="5923" marT="5923" marB="0" anchor="ctr"/>
+                </a:tc>
+                <a:tc>
+                  <a:txBody>
+                    <a:bodyPr/>
+                    <a:lstStyle/>
+                    <a:p>
+                      <a:pPr algn="ctr" rtl="0" fontAlgn="ctr">
+                        <a:buNone/>
+                      </a:pPr>
+                      <a:r>
+                        <a:rPr lang="en-US" sz="1500" u="none" strike="noStrike" dirty="0">
+                          <a:effectLst/>
+                        </a:rPr>
+                        <a:t>U-Net, </a:t>
+                      </a:r>
+                      <a:r>
+                        <a:rPr lang="en-US" sz="1500" u="none" strike="noStrike" dirty="0" err="1">
+                          <a:effectLst/>
+                        </a:rPr>
+                        <a:t>DeepLab</a:t>
+                      </a:r>
+                      <a:r>
+                        <a:rPr lang="en-US" sz="1500" u="none" strike="noStrike" dirty="0">
+                          <a:effectLst/>
+                        </a:rPr>
+                        <a:t>, V-Net</a:t>
+                      </a:r>
+                      <a:endParaRPr lang="en-US" sz="1500" b="0" i="0" u="none" strike="noStrike" dirty="0">
+                        <a:solidFill>
+                          <a:srgbClr val="A9D18E"/>
+                        </a:solidFill>
+                        <a:effectLst/>
+                        <a:latin typeface="Calibri" panose="020F0502020204030204" pitchFamily="34" charset="0"/>
+                      </a:endParaRPr>
+                    </a:p>
+                  </a:txBody>
+                  <a:tcPr marL="5923" marR="5923" marT="5923" marB="0" anchor="ctr"/>
+                </a:tc>
+                <a:tc>
+                  <a:txBody>
+                    <a:bodyPr/>
+                    <a:lstStyle/>
+                    <a:p>
+                      <a:pPr algn="ctr" rtl="0" fontAlgn="ctr">
+                        <a:buNone/>
+                      </a:pPr>
+                      <a:r>
+                        <a:rPr lang="en-US" sz="1500" u="none" strike="noStrike" dirty="0">
+                          <a:effectLst/>
+                        </a:rPr>
+                        <a:t>Tumor/organ segmentation in MRI, CT, and X-rays.</a:t>
+                      </a:r>
+                      <a:endParaRPr lang="en-US" sz="1500" b="0" i="0" u="none" strike="noStrike" dirty="0">
+                        <a:solidFill>
+                          <a:srgbClr val="A9D18E"/>
+                        </a:solidFill>
+                        <a:effectLst/>
+                        <a:latin typeface="Calibri" panose="020F0502020204030204" pitchFamily="34" charset="0"/>
+                      </a:endParaRPr>
+                    </a:p>
+                  </a:txBody>
+                  <a:tcPr marL="5923" marR="5923" marT="5923" marB="0" anchor="ctr"/>
+                </a:tc>
+                <a:extLst>
+                  <a:ext uri="{0D108BD9-81ED-4DB2-BD59-A6C34878D82A}">
+                    <a16:rowId xmlns:a16="http://schemas.microsoft.com/office/drawing/2014/main" val="1891492515"/>
+                  </a:ext>
+                </a:extLst>
+              </a:tr>
+              <a:tr h="915759">
+                <a:tc>
+                  <a:txBody>
+                    <a:bodyPr/>
+                    <a:lstStyle/>
+                    <a:p>
+                      <a:pPr algn="ctr" rtl="0" fontAlgn="ctr">
+                        <a:buNone/>
+                      </a:pPr>
+                      <a:r>
+                        <a:rPr lang="en-US" sz="1500" u="none" strike="noStrike">
+                          <a:effectLst/>
+                        </a:rPr>
+                        <a:t>Automotive</a:t>
+                      </a:r>
+                      <a:endParaRPr lang="en-US" sz="1500" b="0" i="0" u="none" strike="noStrike">
+                        <a:solidFill>
+                          <a:srgbClr val="A9D18E"/>
+                        </a:solidFill>
+                        <a:effectLst/>
+                        <a:latin typeface="Calibri" panose="020F0502020204030204" pitchFamily="34" charset="0"/>
+                      </a:endParaRPr>
+                    </a:p>
+                  </a:txBody>
+                  <a:tcPr marL="5923" marR="5923" marT="5923" marB="0" anchor="ctr"/>
+                </a:tc>
+                <a:tc>
+                  <a:txBody>
+                    <a:bodyPr/>
+                    <a:lstStyle/>
+                    <a:p>
+                      <a:pPr algn="ctr" rtl="0" fontAlgn="ctr">
+                        <a:buNone/>
+                      </a:pPr>
+                      <a:r>
+                        <a:rPr lang="en-US" sz="1500" u="none" strike="noStrike" dirty="0">
+                          <a:effectLst/>
+                        </a:rPr>
+                        <a:t>DeepLabv3+, Mask R-CNN, FCN</a:t>
+                      </a:r>
+                      <a:endParaRPr lang="en-US" sz="1500" b="0" i="0" u="none" strike="noStrike" dirty="0">
+                        <a:solidFill>
+                          <a:srgbClr val="A9D18E"/>
+                        </a:solidFill>
+                        <a:effectLst/>
+                        <a:latin typeface="Calibri" panose="020F0502020204030204" pitchFamily="34" charset="0"/>
+                      </a:endParaRPr>
+                    </a:p>
+                  </a:txBody>
+                  <a:tcPr marL="5923" marR="5923" marT="5923" marB="0" anchor="ctr"/>
+                </a:tc>
+                <a:tc>
+                  <a:txBody>
+                    <a:bodyPr/>
+                    <a:lstStyle/>
+                    <a:p>
+                      <a:pPr algn="ctr" rtl="0" fontAlgn="ctr">
+                        <a:buNone/>
+                      </a:pPr>
+                      <a:r>
+                        <a:rPr lang="en-US" sz="1500" u="none" strike="noStrike" dirty="0">
+                          <a:effectLst/>
+                        </a:rPr>
+                        <a:t>Lane detection, pedestrian tracking, and obstacle avoidance.</a:t>
+                      </a:r>
+                      <a:endParaRPr lang="en-US" sz="1500" b="0" i="0" u="none" strike="noStrike" dirty="0">
+                        <a:solidFill>
+                          <a:srgbClr val="A9D18E"/>
+                        </a:solidFill>
+                        <a:effectLst/>
+                        <a:latin typeface="Calibri" panose="020F0502020204030204" pitchFamily="34" charset="0"/>
+                      </a:endParaRPr>
+                    </a:p>
+                  </a:txBody>
+                  <a:tcPr marL="5923" marR="5923" marT="5923" marB="0" anchor="ctr"/>
+                </a:tc>
+                <a:extLst>
+                  <a:ext uri="{0D108BD9-81ED-4DB2-BD59-A6C34878D82A}">
+                    <a16:rowId xmlns:a16="http://schemas.microsoft.com/office/drawing/2014/main" val="3014200454"/>
+                  </a:ext>
+                </a:extLst>
+              </a:tr>
+              <a:tr h="1143218">
+                <a:tc>
+                  <a:txBody>
+                    <a:bodyPr/>
+                    <a:lstStyle/>
+                    <a:p>
+                      <a:pPr algn="ctr" rtl="0" fontAlgn="ctr">
+                        <a:buNone/>
+                      </a:pPr>
+                      <a:r>
+                        <a:rPr lang="en-US" sz="1500" u="none" strike="noStrike">
+                          <a:effectLst/>
+                        </a:rPr>
+                        <a:t>Agriculture</a:t>
+                      </a:r>
+                      <a:endParaRPr lang="en-US" sz="1500" b="0" i="0" u="none" strike="noStrike">
+                        <a:solidFill>
+                          <a:srgbClr val="A9D18E"/>
+                        </a:solidFill>
+                        <a:effectLst/>
+                        <a:latin typeface="Calibri" panose="020F0502020204030204" pitchFamily="34" charset="0"/>
+                      </a:endParaRPr>
+                    </a:p>
+                  </a:txBody>
+                  <a:tcPr marL="5923" marR="5923" marT="5923" marB="0" anchor="ctr"/>
+                </a:tc>
+                <a:tc>
+                  <a:txBody>
+                    <a:bodyPr/>
+                    <a:lstStyle/>
+                    <a:p>
+                      <a:pPr algn="ctr" rtl="0" fontAlgn="ctr">
+                        <a:buNone/>
+                      </a:pPr>
+                      <a:r>
+                        <a:rPr lang="en-US" sz="1500" u="none" strike="noStrike" dirty="0">
+                          <a:effectLst/>
+                        </a:rPr>
+                        <a:t>SAM, </a:t>
+                      </a:r>
+                      <a:r>
+                        <a:rPr lang="en-US" sz="1500" u="none" strike="noStrike" dirty="0" err="1">
+                          <a:effectLst/>
+                        </a:rPr>
+                        <a:t>ViT</a:t>
+                      </a:r>
+                      <a:r>
+                        <a:rPr lang="en-US" sz="1500" u="none" strike="noStrike" dirty="0">
+                          <a:effectLst/>
+                        </a:rPr>
+                        <a:t>, Mask R-CNN</a:t>
+                      </a:r>
+                      <a:endParaRPr lang="en-US" sz="1500" b="0" i="0" u="none" strike="noStrike" dirty="0">
+                        <a:solidFill>
+                          <a:srgbClr val="A9D18E"/>
+                        </a:solidFill>
+                        <a:effectLst/>
+                        <a:latin typeface="Calibri" panose="020F0502020204030204" pitchFamily="34" charset="0"/>
+                      </a:endParaRPr>
+                    </a:p>
+                  </a:txBody>
+                  <a:tcPr marL="5923" marR="5923" marT="5923" marB="0" anchor="ctr"/>
+                </a:tc>
+                <a:tc>
+                  <a:txBody>
+                    <a:bodyPr/>
+                    <a:lstStyle/>
+                    <a:p>
+                      <a:pPr algn="ctr" rtl="0" fontAlgn="ctr">
+                        <a:buNone/>
+                      </a:pPr>
+                      <a:r>
+                        <a:rPr lang="en-US" sz="1500" u="none" strike="noStrike" dirty="0">
+                          <a:effectLst/>
+                        </a:rPr>
+                        <a:t>Crop health monitoring and identifying individual fruits for automated harvesting.</a:t>
+                      </a:r>
+                      <a:endParaRPr lang="en-US" sz="1500" b="0" i="0" u="none" strike="noStrike" dirty="0">
+                        <a:solidFill>
+                          <a:srgbClr val="A9D18E"/>
+                        </a:solidFill>
+                        <a:effectLst/>
+                        <a:latin typeface="Calibri" panose="020F0502020204030204" pitchFamily="34" charset="0"/>
+                      </a:endParaRPr>
+                    </a:p>
+                  </a:txBody>
+                  <a:tcPr marL="5923" marR="5923" marT="5923" marB="0" anchor="ctr"/>
+                </a:tc>
+                <a:extLst>
+                  <a:ext uri="{0D108BD9-81ED-4DB2-BD59-A6C34878D82A}">
+                    <a16:rowId xmlns:a16="http://schemas.microsoft.com/office/drawing/2014/main" val="3525106652"/>
+                  </a:ext>
+                </a:extLst>
+              </a:tr>
+              <a:tr h="915759">
+                <a:tc>
+                  <a:txBody>
+                    <a:bodyPr/>
+                    <a:lstStyle/>
+                    <a:p>
+                      <a:pPr algn="ctr" rtl="0" fontAlgn="ctr">
+                        <a:buNone/>
+                      </a:pPr>
+                      <a:r>
+                        <a:rPr lang="en-US" sz="1500" u="none" strike="noStrike" dirty="0">
+                          <a:effectLst/>
+                        </a:rPr>
+                        <a:t>Manufacturing</a:t>
+                      </a:r>
+                      <a:endParaRPr lang="en-US" sz="1500" b="0" i="0" u="none" strike="noStrike" dirty="0">
+                        <a:solidFill>
+                          <a:srgbClr val="A9D18E"/>
+                        </a:solidFill>
+                        <a:effectLst/>
+                        <a:latin typeface="Calibri" panose="020F0502020204030204" pitchFamily="34" charset="0"/>
+                      </a:endParaRPr>
+                    </a:p>
+                  </a:txBody>
+                  <a:tcPr marL="5923" marR="5923" marT="5923" marB="0" anchor="ctr"/>
+                </a:tc>
+                <a:tc>
+                  <a:txBody>
+                    <a:bodyPr/>
+                    <a:lstStyle/>
+                    <a:p>
+                      <a:pPr algn="ctr" rtl="0" fontAlgn="ctr">
+                        <a:buNone/>
+                      </a:pPr>
+                      <a:r>
+                        <a:rPr lang="en-US" sz="1500" u="none" strike="noStrike">
+                          <a:effectLst/>
+                        </a:rPr>
+                        <a:t>YOLO-seg, FCN</a:t>
+                      </a:r>
+                      <a:endParaRPr lang="en-US" sz="1500" b="0" i="0" u="none" strike="noStrike">
+                        <a:solidFill>
+                          <a:srgbClr val="A9D18E"/>
+                        </a:solidFill>
+                        <a:effectLst/>
+                        <a:latin typeface="Calibri" panose="020F0502020204030204" pitchFamily="34" charset="0"/>
+                      </a:endParaRPr>
+                    </a:p>
+                  </a:txBody>
+                  <a:tcPr marL="5923" marR="5923" marT="5923" marB="0" anchor="ctr"/>
+                </a:tc>
+                <a:tc>
+                  <a:txBody>
+                    <a:bodyPr/>
+                    <a:lstStyle/>
+                    <a:p>
+                      <a:pPr algn="ctr" rtl="0" fontAlgn="ctr">
+                        <a:buNone/>
+                      </a:pPr>
+                      <a:r>
+                        <a:rPr lang="en-US" sz="1500" u="none" strike="noStrike" dirty="0">
+                          <a:effectLst/>
+                        </a:rPr>
+                        <a:t>Defect detection on circuit boards and assembly line monitoring.</a:t>
+                      </a:r>
+                      <a:endParaRPr lang="en-US" sz="1500" b="0" i="0" u="none" strike="noStrike" dirty="0">
+                        <a:solidFill>
+                          <a:srgbClr val="A9D18E"/>
+                        </a:solidFill>
+                        <a:effectLst/>
+                        <a:latin typeface="Calibri" panose="020F0502020204030204" pitchFamily="34" charset="0"/>
+                      </a:endParaRPr>
+                    </a:p>
+                  </a:txBody>
+                  <a:tcPr marL="5923" marR="5923" marT="5923" marB="0" anchor="ctr"/>
+                </a:tc>
+                <a:extLst>
+                  <a:ext uri="{0D108BD9-81ED-4DB2-BD59-A6C34878D82A}">
+                    <a16:rowId xmlns:a16="http://schemas.microsoft.com/office/drawing/2014/main" val="4140475944"/>
+                  </a:ext>
+                </a:extLst>
+              </a:tr>
+            </a:tbl>
+          </a:graphicData>
+        </a:graphic>
+      </p:graphicFrame>
     </p:spTree>
     <p:extLst>
       <p:ext uri="{BB962C8B-B14F-4D97-AF65-F5344CB8AC3E}">
@@ -4288,7 +5222,43 @@
 </p:sld>
 </file>
 
-<file path=ppt/slides/slide12.xml><?xml version="1.0" encoding="utf-8"?>
+<file path=ppt/slides/slide14.xml><?xml version="1.0" encoding="utf-8"?>
+<p:sld xmlns:a="http://schemas.openxmlformats.org/drawingml/2006/main" xmlns:r="http://schemas.openxmlformats.org/officeDocument/2006/relationships" xmlns:p="http://schemas.openxmlformats.org/presentationml/2006/main">
+  <p:cSld>
+    <p:spTree>
+      <p:nvGrpSpPr>
+        <p:cNvPr id="1" name="">
+          <a:extLst>
+            <a:ext uri="{FF2B5EF4-FFF2-40B4-BE49-F238E27FC236}">
+              <a16:creationId xmlns:a16="http://schemas.microsoft.com/office/drawing/2014/main" id="{53FA2EAD-41D8-71C3-6C05-3A6AFB5AFC0B}"/>
+            </a:ext>
+          </a:extLst>
+        </p:cNvPr>
+        <p:cNvGrpSpPr/>
+        <p:nvPr/>
+      </p:nvGrpSpPr>
+      <p:grpSpPr>
+        <a:xfrm>
+          <a:off x="0" y="0"/>
+          <a:ext cx="0" cy="0"/>
+          <a:chOff x="0" y="0"/>
+          <a:chExt cx="0" cy="0"/>
+        </a:xfrm>
+      </p:grpSpPr>
+    </p:spTree>
+    <p:extLst>
+      <p:ext uri="{BB962C8B-B14F-4D97-AF65-F5344CB8AC3E}">
+        <p14:creationId xmlns:p14="http://schemas.microsoft.com/office/powerpoint/2010/main" val="3700218237"/>
+      </p:ext>
+    </p:extLst>
+  </p:cSld>
+  <p:clrMapOvr>
+    <a:masterClrMapping/>
+  </p:clrMapOvr>
+</p:sld>
+</file>
+
+<file path=ppt/slides/slide15.xml><?xml version="1.0" encoding="utf-8"?>
 <p:sld xmlns:a="http://schemas.openxmlformats.org/drawingml/2006/main" xmlns:r="http://schemas.openxmlformats.org/officeDocument/2006/relationships" xmlns:p="http://schemas.openxmlformats.org/presentationml/2006/main">
   <p:cSld>
     <p:spTree>
@@ -4900,7 +5870,20 @@
                   </a:schemeClr>
                 </a:solidFill>
               </a:rPr>
-              <a:t>Label every pixel (no distinction between instances)</a:t>
+              <a:t>Label every pixel </a:t>
+            </a:r>
+          </a:p>
+          <a:p>
+            <a:r>
+              <a:rPr lang="en-US" sz="2400" dirty="0">
+                <a:solidFill>
+                  <a:schemeClr val="accent6">
+                    <a:lumMod val="60000"/>
+                    <a:lumOff val="40000"/>
+                  </a:schemeClr>
+                </a:solidFill>
+              </a:rPr>
+              <a:t>(no distinction between instances)</a:t>
             </a:r>
           </a:p>
           <a:p>
@@ -4933,6 +5916,8 @@
               </a:rPr>
               <a:t>Example: </a:t>
             </a:r>
+          </a:p>
+          <a:p>
             <a:r>
               <a:rPr lang="en-US" sz="2400" dirty="0">
                 <a:solidFill>
@@ -5185,7 +6170,20 @@
                   </a:schemeClr>
                 </a:solidFill>
               </a:rPr>
-              <a:t> If there are multiple trees in an image it will differentiate each tree and treat them as separate entities despite them all being labelled as “trees." </a:t>
+              <a:t> </a:t>
+            </a:r>
+          </a:p>
+          <a:p>
+            <a:r>
+              <a:rPr lang="en-US" sz="2400" dirty="0">
+                <a:solidFill>
+                  <a:schemeClr val="accent6">
+                    <a:lumMod val="60000"/>
+                    <a:lumOff val="40000"/>
+                  </a:schemeClr>
+                </a:solidFill>
+              </a:rPr>
+              <a:t>If there are multiple trees in an image it will differentiate each tree and treat them as separate entities despite them all being labelled as “trees." </a:t>
             </a:r>
           </a:p>
         </p:txBody>
@@ -5415,7 +6413,20 @@
                   </a:schemeClr>
                 </a:solidFill>
               </a:rPr>
-              <a:t> In a traffic scene it would label all pedestrians and cars which is semantic segmentation while also outlining the location of each individual person and car which is instance segmentation.</a:t>
+              <a:t> </a:t>
+            </a:r>
+          </a:p>
+          <a:p>
+            <a:r>
+              <a:rPr lang="en-US" sz="2400" dirty="0">
+                <a:solidFill>
+                  <a:schemeClr val="accent6">
+                    <a:lumMod val="60000"/>
+                    <a:lumOff val="40000"/>
+                  </a:schemeClr>
+                </a:solidFill>
+              </a:rPr>
+              <a:t>In a traffic scene it would label all pedestrians and cars which is semantic segmentation while also outlining the location of each individual person and car which is instance segmentation.</a:t>
             </a:r>
           </a:p>
           <a:p>
@@ -5556,8 +6567,8 @@
         </p:nvSpPr>
         <p:spPr>
           <a:xfrm>
-            <a:off x="164592" y="118194"/>
-            <a:ext cx="9921240" cy="2308324"/>
+            <a:off x="603504" y="2659559"/>
+            <a:ext cx="9921240" cy="769441"/>
           </a:xfrm>
           <a:prstGeom prst="rect">
             <a:avLst/>
@@ -5570,8 +6581,9 @@
           </a:bodyPr>
           <a:lstStyle/>
           <a:p>
-            <a:r>
-              <a:rPr lang="en-US" sz="2400" b="1" dirty="0">
+            <a:pPr algn="ctr"/>
+            <a:r>
+              <a:rPr lang="en-US" sz="4400" b="1" dirty="0">
                 <a:solidFill>
                   <a:schemeClr val="accent6">
                     <a:lumMod val="60000"/>
@@ -5582,16 +6594,71 @@
               <a:t>Why do we need image segmentation ?</a:t>
             </a:r>
           </a:p>
-          <a:p>
-            <a:endParaRPr lang="en-US" sz="2400" dirty="0">
-              <a:solidFill>
-                <a:schemeClr val="accent6">
-                  <a:lumMod val="60000"/>
-                  <a:lumOff val="40000"/>
-                </a:schemeClr>
-              </a:solidFill>
-            </a:endParaRPr>
-          </a:p>
+        </p:txBody>
+      </p:sp>
+    </p:spTree>
+    <p:extLst>
+      <p:ext uri="{BB962C8B-B14F-4D97-AF65-F5344CB8AC3E}">
+        <p14:creationId xmlns:p14="http://schemas.microsoft.com/office/powerpoint/2010/main" val="676849364"/>
+      </p:ext>
+    </p:extLst>
+  </p:cSld>
+  <p:clrMapOvr>
+    <a:masterClrMapping/>
+  </p:clrMapOvr>
+</p:sld>
+</file>
+
+<file path=ppt/slides/slide7.xml><?xml version="1.0" encoding="utf-8"?>
+<p:sld xmlns:a="http://schemas.openxmlformats.org/drawingml/2006/main" xmlns:r="http://schemas.openxmlformats.org/officeDocument/2006/relationships" xmlns:p="http://schemas.openxmlformats.org/presentationml/2006/main">
+  <p:cSld>
+    <p:spTree>
+      <p:nvGrpSpPr>
+        <p:cNvPr id="1" name="">
+          <a:extLst>
+            <a:ext uri="{FF2B5EF4-FFF2-40B4-BE49-F238E27FC236}">
+              <a16:creationId xmlns:a16="http://schemas.microsoft.com/office/drawing/2014/main" id="{CBD36B2B-6227-947C-1CEA-324D452DE354}"/>
+            </a:ext>
+          </a:extLst>
+        </p:cNvPr>
+        <p:cNvGrpSpPr/>
+        <p:nvPr/>
+      </p:nvGrpSpPr>
+      <p:grpSpPr>
+        <a:xfrm>
+          <a:off x="0" y="0"/>
+          <a:ext cx="0" cy="0"/>
+          <a:chOff x="0" y="0"/>
+          <a:chExt cx="0" cy="0"/>
+        </a:xfrm>
+      </p:grpSpPr>
+      <p:sp>
+        <p:nvSpPr>
+          <p:cNvPr id="4" name="TextBox 3">
+            <a:extLst>
+              <a:ext uri="{FF2B5EF4-FFF2-40B4-BE49-F238E27FC236}">
+                <a16:creationId xmlns:a16="http://schemas.microsoft.com/office/drawing/2014/main" id="{492B2899-B6FA-67A6-6017-8F26460285F7}"/>
+              </a:ext>
+            </a:extLst>
+          </p:cNvPr>
+          <p:cNvSpPr txBox="1"/>
+          <p:nvPr/>
+        </p:nvSpPr>
+        <p:spPr>
+          <a:xfrm>
+            <a:off x="164592" y="118194"/>
+            <a:ext cx="9921240" cy="1569660"/>
+          </a:xfrm>
+          <a:prstGeom prst="rect">
+            <a:avLst/>
+          </a:prstGeom>
+          <a:noFill/>
+        </p:spPr>
+        <p:txBody>
+          <a:bodyPr wrap="square">
+            <a:spAutoFit/>
+          </a:bodyPr>
+          <a:lstStyle/>
           <a:p>
             <a:r>
               <a:rPr lang="en-US" sz="2400" b="1" dirty="0">
@@ -5636,7 +6703,7 @@
           <p:cNvPr id="6" name="Picture 5">
             <a:extLst>
               <a:ext uri="{FF2B5EF4-FFF2-40B4-BE49-F238E27FC236}">
-                <a16:creationId xmlns:a16="http://schemas.microsoft.com/office/drawing/2014/main" id="{8366FF8F-F30D-E681-49C6-4C45B695AA03}"/>
+                <a16:creationId xmlns:a16="http://schemas.microsoft.com/office/drawing/2014/main" id="{27D8862C-D5A3-AF14-7E79-3FDD1B7814F0}"/>
               </a:ext>
             </a:extLst>
           </p:cNvPr>
@@ -5666,7 +6733,7 @@
           <p:cNvPr id="8" name="Picture 7">
             <a:extLst>
               <a:ext uri="{FF2B5EF4-FFF2-40B4-BE49-F238E27FC236}">
-                <a16:creationId xmlns:a16="http://schemas.microsoft.com/office/drawing/2014/main" id="{821A8666-4F1D-AE2F-8201-D6EFBB517BB7}"/>
+                <a16:creationId xmlns:a16="http://schemas.microsoft.com/office/drawing/2014/main" id="{22468A1A-E937-D56C-B449-5F5E1EE3F8C6}"/>
               </a:ext>
             </a:extLst>
           </p:cNvPr>
@@ -5696,7 +6763,7 @@
           <p:cNvPr id="9" name="TextBox 8">
             <a:extLst>
               <a:ext uri="{FF2B5EF4-FFF2-40B4-BE49-F238E27FC236}">
-                <a16:creationId xmlns:a16="http://schemas.microsoft.com/office/drawing/2014/main" id="{BC3990EE-7A2B-0E68-5E93-F11962D1C9B7}"/>
+                <a16:creationId xmlns:a16="http://schemas.microsoft.com/office/drawing/2014/main" id="{BA147CF9-084F-E948-258F-206FA5BB1CB4}"/>
               </a:ext>
             </a:extLst>
           </p:cNvPr>
@@ -5736,7 +6803,7 @@
     </p:spTree>
     <p:extLst>
       <p:ext uri="{BB962C8B-B14F-4D97-AF65-F5344CB8AC3E}">
-        <p14:creationId xmlns:p14="http://schemas.microsoft.com/office/powerpoint/2010/main" val="676849364"/>
+        <p14:creationId xmlns:p14="http://schemas.microsoft.com/office/powerpoint/2010/main" val="63697184"/>
       </p:ext>
     </p:extLst>
   </p:cSld>
@@ -5746,7 +6813,7 @@
 </p:sld>
 </file>
 
-<file path=ppt/slides/slide7.xml><?xml version="1.0" encoding="utf-8"?>
+<file path=ppt/slides/slide8.xml><?xml version="1.0" encoding="utf-8"?>
 <p:sld xmlns:a="http://schemas.openxmlformats.org/drawingml/2006/main" xmlns:r="http://schemas.openxmlformats.org/officeDocument/2006/relationships" xmlns:p="http://schemas.openxmlformats.org/presentationml/2006/main">
   <p:cSld>
     <p:spTree>
@@ -5784,7 +6851,7 @@
         <p:spPr>
           <a:xfrm>
             <a:off x="164592" y="118194"/>
-            <a:ext cx="9921240" cy="1938992"/>
+            <a:ext cx="9921240" cy="1200329"/>
           </a:xfrm>
           <a:prstGeom prst="rect">
             <a:avLst/>
@@ -5796,29 +6863,6 @@
             <a:spAutoFit/>
           </a:bodyPr>
           <a:lstStyle/>
-          <a:p>
-            <a:r>
-              <a:rPr lang="en-US" sz="2400" b="1" dirty="0">
-                <a:solidFill>
-                  <a:schemeClr val="accent6">
-                    <a:lumMod val="60000"/>
-                    <a:lumOff val="40000"/>
-                  </a:schemeClr>
-                </a:solidFill>
-              </a:rPr>
-              <a:t>Why do we need image segmentation ?</a:t>
-            </a:r>
-          </a:p>
-          <a:p>
-            <a:endParaRPr lang="en-US" sz="2400" dirty="0">
-              <a:solidFill>
-                <a:schemeClr val="accent6">
-                  <a:lumMod val="60000"/>
-                  <a:lumOff val="40000"/>
-                </a:schemeClr>
-              </a:solidFill>
-            </a:endParaRPr>
-          </a:p>
           <a:p>
             <a:r>
               <a:rPr lang="en-US" sz="2400" b="1" dirty="0">
@@ -5984,7 +7028,7 @@
 </p:sld>
 </file>
 
-<file path=ppt/slides/slide8.xml><?xml version="1.0" encoding="utf-8"?>
+<file path=ppt/slides/slide9.xml><?xml version="1.0" encoding="utf-8"?>
 <p:sld xmlns:a="http://schemas.openxmlformats.org/drawingml/2006/main" xmlns:r="http://schemas.openxmlformats.org/officeDocument/2006/relationships" xmlns:p="http://schemas.openxmlformats.org/presentationml/2006/main">
   <p:cSld>
     <p:spTree>
@@ -6022,7 +7066,7 @@
         <p:spPr>
           <a:xfrm>
             <a:off x="164592" y="118194"/>
-            <a:ext cx="9921240" cy="1938992"/>
+            <a:ext cx="9921240" cy="1200329"/>
           </a:xfrm>
           <a:prstGeom prst="rect">
             <a:avLst/>
@@ -6034,29 +7078,6 @@
             <a:spAutoFit/>
           </a:bodyPr>
           <a:lstStyle/>
-          <a:p>
-            <a:r>
-              <a:rPr lang="en-US" sz="2400" b="1" dirty="0">
-                <a:solidFill>
-                  <a:schemeClr val="accent6">
-                    <a:lumMod val="60000"/>
-                    <a:lumOff val="40000"/>
-                  </a:schemeClr>
-                </a:solidFill>
-              </a:rPr>
-              <a:t>Why do we need image segmentation ?</a:t>
-            </a:r>
-          </a:p>
-          <a:p>
-            <a:endParaRPr lang="en-US" sz="2400" dirty="0">
-              <a:solidFill>
-                <a:schemeClr val="accent6">
-                  <a:lumMod val="60000"/>
-                  <a:lumOff val="40000"/>
-                </a:schemeClr>
-              </a:solidFill>
-            </a:endParaRPr>
-          </a:p>
           <a:p>
             <a:r>
               <a:rPr lang="en-US" sz="2400" b="1" dirty="0">
@@ -6188,350 +7209,6 @@
     <p:extLst>
       <p:ext uri="{BB962C8B-B14F-4D97-AF65-F5344CB8AC3E}">
         <p14:creationId xmlns:p14="http://schemas.microsoft.com/office/powerpoint/2010/main" val="2680138143"/>
-      </p:ext>
-    </p:extLst>
-  </p:cSld>
-  <p:clrMapOvr>
-    <a:masterClrMapping/>
-  </p:clrMapOvr>
-</p:sld>
-</file>
-
-<file path=ppt/slides/slide9.xml><?xml version="1.0" encoding="utf-8"?>
-<p:sld xmlns:a="http://schemas.openxmlformats.org/drawingml/2006/main" xmlns:r="http://schemas.openxmlformats.org/officeDocument/2006/relationships" xmlns:p="http://schemas.openxmlformats.org/presentationml/2006/main">
-  <p:cSld>
-    <p:spTree>
-      <p:nvGrpSpPr>
-        <p:cNvPr id="1" name="">
-          <a:extLst>
-            <a:ext uri="{FF2B5EF4-FFF2-40B4-BE49-F238E27FC236}">
-              <a16:creationId xmlns:a16="http://schemas.microsoft.com/office/drawing/2014/main" id="{879B318C-05A5-7EFB-30F5-32AB6A862469}"/>
-            </a:ext>
-          </a:extLst>
-        </p:cNvPr>
-        <p:cNvGrpSpPr/>
-        <p:nvPr/>
-      </p:nvGrpSpPr>
-      <p:grpSpPr>
-        <a:xfrm>
-          <a:off x="0" y="0"/>
-          <a:ext cx="0" cy="0"/>
-          <a:chOff x="0" y="0"/>
-          <a:chExt cx="0" cy="0"/>
-        </a:xfrm>
-      </p:grpSpPr>
-      <p:sp>
-        <p:nvSpPr>
-          <p:cNvPr id="4" name="TextBox 3">
-            <a:extLst>
-              <a:ext uri="{FF2B5EF4-FFF2-40B4-BE49-F238E27FC236}">
-                <a16:creationId xmlns:a16="http://schemas.microsoft.com/office/drawing/2014/main" id="{CA375A26-49CB-0056-00C2-8F91436CD4DD}"/>
-              </a:ext>
-            </a:extLst>
-          </p:cNvPr>
-          <p:cNvSpPr txBox="1"/>
-          <p:nvPr/>
-        </p:nvSpPr>
-        <p:spPr>
-          <a:xfrm>
-            <a:off x="265176" y="346794"/>
-            <a:ext cx="11283696" cy="5632311"/>
-          </a:xfrm>
-          <a:prstGeom prst="rect">
-            <a:avLst/>
-          </a:prstGeom>
-          <a:noFill/>
-        </p:spPr>
-        <p:txBody>
-          <a:bodyPr wrap="square">
-            <a:spAutoFit/>
-          </a:bodyPr>
-          <a:lstStyle/>
-          <a:p>
-            <a:r>
-              <a:rPr lang="en-US" sz="2400" dirty="0">
-                <a:solidFill>
-                  <a:schemeClr val="accent6">
-                    <a:lumMod val="60000"/>
-                    <a:lumOff val="40000"/>
-                  </a:schemeClr>
-                </a:solidFill>
-              </a:rPr>
-              <a:t>2. Evolution of Segmentation Models</a:t>
-            </a:r>
-          </a:p>
-          <a:p>
-            <a:endParaRPr lang="en-US" sz="2400" dirty="0">
-              <a:solidFill>
-                <a:schemeClr val="accent6">
-                  <a:lumMod val="60000"/>
-                  <a:lumOff val="40000"/>
-                </a:schemeClr>
-              </a:solidFill>
-            </a:endParaRPr>
-          </a:p>
-          <a:p>
-            <a:r>
-              <a:rPr lang="en-US" sz="2400" b="1" dirty="0">
-                <a:solidFill>
-                  <a:schemeClr val="accent6">
-                    <a:lumMod val="60000"/>
-                    <a:lumOff val="40000"/>
-                  </a:schemeClr>
-                </a:solidFill>
-              </a:rPr>
-              <a:t>Phase 1: Classical CNN Era (2014–2017)</a:t>
-            </a:r>
-          </a:p>
-          <a:p>
-            <a:pPr marL="342900" indent="-342900">
-              <a:buFont typeface="Arial" panose="020B0604020202020204" pitchFamily="34" charset="0"/>
-              <a:buChar char="•"/>
-            </a:pPr>
-            <a:r>
-              <a:rPr lang="en-US" sz="2400" dirty="0">
-                <a:solidFill>
-                  <a:schemeClr val="accent6">
-                    <a:lumMod val="60000"/>
-                    <a:lumOff val="40000"/>
-                  </a:schemeClr>
-                </a:solidFill>
-              </a:rPr>
-              <a:t>Fully Convolutional Networks (FCN) → first breakthrough </a:t>
-            </a:r>
-          </a:p>
-          <a:p>
-            <a:pPr marL="342900" indent="-342900">
-              <a:buFont typeface="Arial" panose="020B0604020202020204" pitchFamily="34" charset="0"/>
-              <a:buChar char="•"/>
-            </a:pPr>
-            <a:r>
-              <a:rPr lang="en-US" sz="2400" dirty="0">
-                <a:solidFill>
-                  <a:schemeClr val="accent6">
-                    <a:lumMod val="60000"/>
-                    <a:lumOff val="40000"/>
-                  </a:schemeClr>
-                </a:solidFill>
-              </a:rPr>
-              <a:t>Then came: </a:t>
-            </a:r>
-          </a:p>
-          <a:p>
-            <a:pPr lvl="1"/>
-            <a:r>
-              <a:rPr lang="en-US" sz="2400" dirty="0">
-                <a:solidFill>
-                  <a:schemeClr val="accent6">
-                    <a:lumMod val="60000"/>
-                    <a:lumOff val="40000"/>
-                  </a:schemeClr>
-                </a:solidFill>
-              </a:rPr>
-              <a:t>U-Net </a:t>
-            </a:r>
-          </a:p>
-          <a:p>
-            <a:pPr lvl="1"/>
-            <a:r>
-              <a:rPr lang="en-US" sz="2400" dirty="0" err="1">
-                <a:solidFill>
-                  <a:schemeClr val="accent6">
-                    <a:lumMod val="60000"/>
-                    <a:lumOff val="40000"/>
-                  </a:schemeClr>
-                </a:solidFill>
-              </a:rPr>
-              <a:t>SegNet</a:t>
-            </a:r>
-            <a:r>
-              <a:rPr lang="en-US" sz="2400" dirty="0">
-                <a:solidFill>
-                  <a:schemeClr val="accent6">
-                    <a:lumMod val="60000"/>
-                    <a:lumOff val="40000"/>
-                  </a:schemeClr>
-                </a:solidFill>
-              </a:rPr>
-              <a:t> </a:t>
-            </a:r>
-          </a:p>
-          <a:p>
-            <a:pPr lvl="1"/>
-            <a:r>
-              <a:rPr lang="en-US" sz="2400" dirty="0" err="1">
-                <a:solidFill>
-                  <a:schemeClr val="accent6">
-                    <a:lumMod val="60000"/>
-                    <a:lumOff val="40000"/>
-                  </a:schemeClr>
-                </a:solidFill>
-              </a:rPr>
-              <a:t>DeepLab</a:t>
-            </a:r>
-            <a:endParaRPr lang="en-US" sz="2400" dirty="0">
-              <a:solidFill>
-                <a:schemeClr val="accent6">
-                  <a:lumMod val="60000"/>
-                  <a:lumOff val="40000"/>
-                </a:schemeClr>
-              </a:solidFill>
-            </a:endParaRPr>
-          </a:p>
-          <a:p>
-            <a:endParaRPr lang="en-US" sz="2400" dirty="0">
-              <a:solidFill>
-                <a:schemeClr val="accent6">
-                  <a:lumMod val="60000"/>
-                  <a:lumOff val="40000"/>
-                </a:schemeClr>
-              </a:solidFill>
-            </a:endParaRPr>
-          </a:p>
-          <a:p>
-            <a:r>
-              <a:rPr lang="en-US" sz="2400" b="1" dirty="0">
-                <a:solidFill>
-                  <a:schemeClr val="accent6">
-                    <a:lumMod val="60000"/>
-                    <a:lumOff val="40000"/>
-                  </a:schemeClr>
-                </a:solidFill>
-              </a:rPr>
-              <a:t>Phase 2: Detection + Segmentation (2017–2020)</a:t>
-            </a:r>
-          </a:p>
-          <a:p>
-            <a:pPr marL="342900" indent="-342900">
-              <a:buFont typeface="Arial" panose="020B0604020202020204" pitchFamily="34" charset="0"/>
-              <a:buChar char="•"/>
-            </a:pPr>
-            <a:r>
-              <a:rPr lang="en-US" sz="2400" b="1" dirty="0">
-                <a:solidFill>
-                  <a:schemeClr val="accent6">
-                    <a:lumMod val="60000"/>
-                    <a:lumOff val="40000"/>
-                  </a:schemeClr>
-                </a:solidFill>
-              </a:rPr>
-              <a:t>Mask R-CNN</a:t>
-            </a:r>
-            <a:r>
-              <a:rPr lang="en-US" sz="2400" dirty="0">
-                <a:solidFill>
-                  <a:schemeClr val="accent6">
-                    <a:lumMod val="60000"/>
-                    <a:lumOff val="40000"/>
-                  </a:schemeClr>
-                </a:solidFill>
-              </a:rPr>
-              <a:t> → instance segmentation breakthrough </a:t>
-            </a:r>
-          </a:p>
-          <a:p>
-            <a:pPr marL="342900" indent="-342900">
-              <a:buFont typeface="Arial" panose="020B0604020202020204" pitchFamily="34" charset="0"/>
-              <a:buChar char="•"/>
-            </a:pPr>
-            <a:r>
-              <a:rPr lang="en-US" sz="2400" dirty="0">
-                <a:solidFill>
-                  <a:schemeClr val="accent6">
-                    <a:lumMod val="60000"/>
-                    <a:lumOff val="40000"/>
-                  </a:schemeClr>
-                </a:solidFill>
-              </a:rPr>
-              <a:t>Built on object detection pipelines </a:t>
-            </a:r>
-          </a:p>
-          <a:p>
-            <a:endParaRPr lang="en-US" sz="2400" dirty="0">
-              <a:solidFill>
-                <a:schemeClr val="accent6">
-                  <a:lumMod val="60000"/>
-                  <a:lumOff val="40000"/>
-                </a:schemeClr>
-              </a:solidFill>
-            </a:endParaRPr>
-          </a:p>
-          <a:p>
-            <a:r>
-              <a:rPr lang="en-US" sz="2400" b="1" dirty="0">
-                <a:solidFill>
-                  <a:schemeClr val="accent6">
-                    <a:lumMod val="60000"/>
-                    <a:lumOff val="40000"/>
-                  </a:schemeClr>
-                </a:solidFill>
-              </a:rPr>
-              <a:t>Phase 3: Advanced CNN Architectures</a:t>
-            </a:r>
-          </a:p>
-          <a:p>
-            <a:r>
-              <a:rPr lang="en-US" sz="2400" dirty="0">
-                <a:solidFill>
-                  <a:schemeClr val="accent6">
-                    <a:lumMod val="60000"/>
-                    <a:lumOff val="40000"/>
-                  </a:schemeClr>
-                </a:solidFill>
-              </a:rPr>
-              <a:t>Variants of U-Net: </a:t>
-            </a:r>
-            <a:r>
-              <a:rPr lang="en-US" sz="2400" dirty="0" err="1">
-                <a:solidFill>
-                  <a:schemeClr val="accent6">
-                    <a:lumMod val="60000"/>
-                    <a:lumOff val="40000"/>
-                  </a:schemeClr>
-                </a:solidFill>
-              </a:rPr>
-              <a:t>UNet</a:t>
-            </a:r>
-            <a:r>
-              <a:rPr lang="en-US" sz="2400" dirty="0">
-                <a:solidFill>
-                  <a:schemeClr val="accent6">
-                    <a:lumMod val="60000"/>
-                    <a:lumOff val="40000"/>
-                  </a:schemeClr>
-                </a:solidFill>
-              </a:rPr>
-              <a:t>++ , Attention U-Net , </a:t>
-            </a:r>
-            <a:r>
-              <a:rPr lang="en-US" sz="2400" dirty="0" err="1">
-                <a:solidFill>
-                  <a:schemeClr val="accent6">
-                    <a:lumMod val="60000"/>
-                    <a:lumOff val="40000"/>
-                  </a:schemeClr>
-                </a:solidFill>
-              </a:rPr>
-              <a:t>ResUNet</a:t>
-            </a:r>
-            <a:r>
-              <a:rPr lang="en-US" sz="2400" dirty="0">
-                <a:solidFill>
-                  <a:schemeClr val="accent6">
-                    <a:lumMod val="60000"/>
-                    <a:lumOff val="40000"/>
-                  </a:schemeClr>
-                </a:solidFill>
-              </a:rPr>
-              <a:t> </a:t>
-            </a:r>
-          </a:p>
-        </p:txBody>
-      </p:sp>
-    </p:spTree>
-    <p:extLst>
-      <p:ext uri="{BB962C8B-B14F-4D97-AF65-F5344CB8AC3E}">
-        <p14:creationId xmlns:p14="http://schemas.microsoft.com/office/powerpoint/2010/main" val="2029071977"/>
       </p:ext>
     </p:extLst>
   </p:cSld>
